--- a/ds_candidate_assignment/Spendy_Loyalty_Presentation_Premium.pptx
+++ b/ds_candidate_assignment/Spendy_Loyalty_Presentation_Premium.pptx
@@ -8732,7 +8732,7 @@
         <p:spPr>
           <a:xfrm>
             <a:off x="502920" y="4910328"/>
-            <a:ext cx="7498079" cy="1005840"/>
+            <a:ext cx="7498079" cy="628377"/>
           </a:xfrm>
           <a:prstGeom prst="rect">
             <a:avLst/>
@@ -8751,7 +8751,7 @@
               </a:spcBef>
             </a:pPr>
             <a:r>
-              <a:rPr sz="1050">
+              <a:rPr sz="1050" dirty="0">
                 <a:solidFill>
                   <a:srgbClr val="2C3E50"/>
                 </a:solidFill>
@@ -8766,7 +8766,7 @@
               </a:spcBef>
             </a:pPr>
             <a:r>
-              <a:rPr sz="1050">
+              <a:rPr sz="1050" dirty="0">
                 <a:solidFill>
                   <a:srgbClr val="2C3E50"/>
                 </a:solidFill>
@@ -8781,13 +8781,42 @@
               </a:spcBef>
             </a:pPr>
             <a:r>
+              <a:rPr sz="1050" dirty="0">
+                <a:solidFill>
+                  <a:srgbClr val="2C3E50"/>
+                </a:solidFill>
+              </a:rPr>
+              <a:t>–  Proactive segmentation at Month 2 → differentiated campaigns → better ROI per </a:t>
+            </a:r>
+            <a:r>
               <a:rPr sz="1050">
                 <a:solidFill>
                   <a:srgbClr val="2C3E50"/>
                 </a:solidFill>
               </a:rPr>
-              <a:t>–  Proactive segmentation at Month 2 → differentiated campaigns → better ROI per marketing pound.</a:t>
-            </a:r>
+              <a:t>marketing </a:t>
+            </a:r>
+            <a:r>
+              <a:rPr lang="en-US" sz="1050">
+                <a:solidFill>
+                  <a:srgbClr val="2C3E50"/>
+                </a:solidFill>
+              </a:rPr>
+              <a:t>cost</a:t>
+            </a:r>
+            <a:r>
+              <a:rPr sz="1050">
+                <a:solidFill>
+                  <a:srgbClr val="2C3E50"/>
+                </a:solidFill>
+              </a:rPr>
+              <a:t>.</a:t>
+            </a:r>
+            <a:endParaRPr sz="1050" dirty="0">
+              <a:solidFill>
+                <a:srgbClr val="2C3E50"/>
+              </a:solidFill>
+            </a:endParaRPr>
           </a:p>
         </p:txBody>
       </p:sp>
@@ -13491,15 +13520,39 @@
           <a:p>
             <a:pPr algn="l"/>
             <a:r>
-              <a:rPr sz="1100" b="1" i="0">
+              <a:rPr sz="1100" b="1" i="0" dirty="0" err="1">
                 <a:solidFill>
                   <a:srgbClr val="2D6A9F"/>
                 </a:solidFill>
                 <a:latin typeface="Calibri"/>
               </a:rPr>
-              <a:t>days_since_last_purchase
-_in_window</a:t>
-            </a:r>
+              <a:t>days_since_last_purchase</a:t>
+            </a:r>
+            <a:r>
+              <a:rPr sz="1100" b="1" i="0" dirty="0">
+                <a:solidFill>
+                  <a:srgbClr val="2D6A9F"/>
+                </a:solidFill>
+                <a:latin typeface="Calibri"/>
+              </a:rPr>
+              <a:t>
+_</a:t>
+            </a:r>
+            <a:r>
+              <a:rPr sz="1100" b="1" i="0" dirty="0" err="1">
+                <a:solidFill>
+                  <a:srgbClr val="2D6A9F"/>
+                </a:solidFill>
+                <a:latin typeface="Calibri"/>
+              </a:rPr>
+              <a:t>in_window</a:t>
+            </a:r>
+            <a:endParaRPr sz="1100" b="1" i="0" dirty="0">
+              <a:solidFill>
+                <a:srgbClr val="2D6A9F"/>
+              </a:solidFill>
+              <a:latin typeface="Calibri"/>
+            </a:endParaRPr>
           </a:p>
         </p:txBody>
       </p:sp>

--- a/ds_candidate_assignment/Spendy_Loyalty_Presentation_Premium.pptx
+++ b/ds_candidate_assignment/Spendy_Loyalty_Presentation_Premium.pptx
@@ -1586,7 +1586,7 @@
           <a:p>
             <a:fld id="{5BCAD085-E8A6-8845-BD4E-CB4CCA059FC4}" type="datetimeFigureOut">
               <a:rPr lang="en-US" smtClean="0"/>
-              <a:t>7/16/2026</a:t>
+              <a:t>7/17/2026</a:t>
             </a:fld>
             <a:endParaRPr lang="en-US"/>
           </a:p>
@@ -1754,7 +1754,7 @@
           <a:p>
             <a:fld id="{5BCAD085-E8A6-8845-BD4E-CB4CCA059FC4}" type="datetimeFigureOut">
               <a:rPr lang="en-US" smtClean="0"/>
-              <a:t>7/16/2026</a:t>
+              <a:t>7/17/2026</a:t>
             </a:fld>
             <a:endParaRPr lang="en-US"/>
           </a:p>
@@ -1932,7 +1932,7 @@
           <a:p>
             <a:fld id="{5BCAD085-E8A6-8845-BD4E-CB4CCA059FC4}" type="datetimeFigureOut">
               <a:rPr lang="en-US" smtClean="0"/>
-              <a:t>7/16/2026</a:t>
+              <a:t>7/17/2026</a:t>
             </a:fld>
             <a:endParaRPr lang="en-US"/>
           </a:p>
@@ -2100,7 +2100,7 @@
           <a:p>
             <a:fld id="{5BCAD085-E8A6-8845-BD4E-CB4CCA059FC4}" type="datetimeFigureOut">
               <a:rPr lang="en-US" smtClean="0"/>
-              <a:t>7/16/2026</a:t>
+              <a:t>7/17/2026</a:t>
             </a:fld>
             <a:endParaRPr lang="en-US"/>
           </a:p>
@@ -2345,7 +2345,7 @@
           <a:p>
             <a:fld id="{5BCAD085-E8A6-8845-BD4E-CB4CCA059FC4}" type="datetimeFigureOut">
               <a:rPr lang="en-US" smtClean="0"/>
-              <a:t>7/16/2026</a:t>
+              <a:t>7/17/2026</a:t>
             </a:fld>
             <a:endParaRPr lang="en-US"/>
           </a:p>
@@ -2630,7 +2630,7 @@
           <a:p>
             <a:fld id="{5BCAD085-E8A6-8845-BD4E-CB4CCA059FC4}" type="datetimeFigureOut">
               <a:rPr lang="en-US" smtClean="0"/>
-              <a:t>7/16/2026</a:t>
+              <a:t>7/17/2026</a:t>
             </a:fld>
             <a:endParaRPr lang="en-US"/>
           </a:p>
@@ -3049,7 +3049,7 @@
           <a:p>
             <a:fld id="{5BCAD085-E8A6-8845-BD4E-CB4CCA059FC4}" type="datetimeFigureOut">
               <a:rPr lang="en-US" smtClean="0"/>
-              <a:t>7/16/2026</a:t>
+              <a:t>7/17/2026</a:t>
             </a:fld>
             <a:endParaRPr lang="en-US"/>
           </a:p>
@@ -3166,7 +3166,7 @@
           <a:p>
             <a:fld id="{5BCAD085-E8A6-8845-BD4E-CB4CCA059FC4}" type="datetimeFigureOut">
               <a:rPr lang="en-US" smtClean="0"/>
-              <a:t>7/16/2026</a:t>
+              <a:t>7/17/2026</a:t>
             </a:fld>
             <a:endParaRPr lang="en-US"/>
           </a:p>
@@ -3261,7 +3261,7 @@
           <a:p>
             <a:fld id="{5BCAD085-E8A6-8845-BD4E-CB4CCA059FC4}" type="datetimeFigureOut">
               <a:rPr lang="en-US" smtClean="0"/>
-              <a:t>7/16/2026</a:t>
+              <a:t>7/17/2026</a:t>
             </a:fld>
             <a:endParaRPr lang="en-US"/>
           </a:p>
@@ -3536,7 +3536,7 @@
           <a:p>
             <a:fld id="{5BCAD085-E8A6-8845-BD4E-CB4CCA059FC4}" type="datetimeFigureOut">
               <a:rPr lang="en-US" smtClean="0"/>
-              <a:t>7/16/2026</a:t>
+              <a:t>7/17/2026</a:t>
             </a:fld>
             <a:endParaRPr lang="en-US"/>
           </a:p>
@@ -3788,7 +3788,7 @@
           <a:p>
             <a:fld id="{5BCAD085-E8A6-8845-BD4E-CB4CCA059FC4}" type="datetimeFigureOut">
               <a:rPr lang="en-US" smtClean="0"/>
-              <a:t>7/16/2026</a:t>
+              <a:t>7/17/2026</a:t>
             </a:fld>
             <a:endParaRPr lang="en-US"/>
           </a:p>
@@ -3999,7 +3999,7 @@
           <a:p>
             <a:fld id="{5BCAD085-E8A6-8845-BD4E-CB4CCA059FC4}" type="datetimeFigureOut">
               <a:rPr lang="en-US" smtClean="0"/>
-              <a:t>7/16/2026</a:t>
+              <a:t>7/17/2026</a:t>
             </a:fld>
             <a:endParaRPr lang="en-US"/>
           </a:p>
@@ -7884,7 +7884,7 @@
         <p:spPr>
           <a:xfrm>
             <a:off x="8275320" y="1828800"/>
-            <a:ext cx="3291840" cy="4114800"/>
+            <a:ext cx="3291840" cy="1577355"/>
           </a:xfrm>
           <a:prstGeom prst="rect">
             <a:avLst/>
@@ -7913,7 +7913,7 @@
                   <a:srgbClr val="2C3E50"/>
                 </a:solidFill>
               </a:rPr>
-              <a:t>Scores applied to all 8,468 eligible new users,
+              <a:t>Scores applied to all eligible new users,
 bucketed into Low / Medium / High probability tiers</a:t>
             </a:r>
           </a:p>
@@ -17206,7 +17206,7 @@
         </p:nvSpPr>
         <p:spPr>
           <a:xfrm>
-            <a:off x="274320" y="1143000"/>
+            <a:off x="292608" y="1824227"/>
             <a:ext cx="3794760" cy="685800"/>
           </a:xfrm>
           <a:prstGeom prst="rect">
@@ -17250,7 +17250,7 @@
         </p:nvSpPr>
         <p:spPr>
           <a:xfrm>
-            <a:off x="365760" y="1170432"/>
+            <a:off x="384048" y="1851659"/>
             <a:ext cx="3611880" cy="292608"/>
           </a:xfrm>
           <a:prstGeom prst="rect">
@@ -17285,7 +17285,7 @@
         </p:nvSpPr>
         <p:spPr>
           <a:xfrm>
-            <a:off x="365760" y="1444752"/>
+            <a:off x="384048" y="2125979"/>
             <a:ext cx="3611880" cy="320040"/>
           </a:xfrm>
           <a:prstGeom prst="rect">
@@ -17320,7 +17320,7 @@
         </p:nvSpPr>
         <p:spPr>
           <a:xfrm>
-            <a:off x="274320" y="1828800"/>
+            <a:off x="292608" y="2510027"/>
             <a:ext cx="3794760" cy="502920"/>
           </a:xfrm>
           <a:prstGeom prst="rect">
@@ -17364,7 +17364,7 @@
         </p:nvSpPr>
         <p:spPr>
           <a:xfrm>
-            <a:off x="365760" y="1874519"/>
+            <a:off x="384048" y="2555746"/>
             <a:ext cx="3611880" cy="256032"/>
           </a:xfrm>
           <a:prstGeom prst="rect">
@@ -17380,7 +17380,7 @@
           <a:p>
             <a:pPr algn="ctr"/>
             <a:r>
-              <a:rPr sz="950" b="1" i="0">
+              <a:rPr sz="950" b="1" i="0" dirty="0">
                 <a:solidFill>
                   <a:srgbClr val="95A5A6"/>
                 </a:solidFill>
@@ -17399,7 +17399,7 @@
         </p:nvSpPr>
         <p:spPr>
           <a:xfrm>
-            <a:off x="365760" y="2084831"/>
+            <a:off x="384048" y="2766058"/>
             <a:ext cx="3611880" cy="201168"/>
           </a:xfrm>
           <a:prstGeom prst="rect">
@@ -17434,7 +17434,7 @@
         </p:nvSpPr>
         <p:spPr>
           <a:xfrm>
-            <a:off x="274320" y="2331720"/>
+            <a:off x="292608" y="3012947"/>
             <a:ext cx="3794760" cy="347472"/>
           </a:xfrm>
           <a:prstGeom prst="rect">
@@ -17478,7 +17478,7 @@
         </p:nvSpPr>
         <p:spPr>
           <a:xfrm>
-            <a:off x="365760" y="2359152"/>
+            <a:off x="384048" y="3040379"/>
             <a:ext cx="3611880" cy="292608"/>
           </a:xfrm>
           <a:prstGeom prst="rect">
@@ -17513,7 +17513,7 @@
         </p:nvSpPr>
         <p:spPr>
           <a:xfrm>
-            <a:off x="274320" y="2679192"/>
+            <a:off x="292608" y="3360419"/>
             <a:ext cx="3794760" cy="914400"/>
           </a:xfrm>
           <a:prstGeom prst="rect">
@@ -17557,7 +17557,7 @@
         </p:nvSpPr>
         <p:spPr>
           <a:xfrm>
-            <a:off x="384048" y="2679192"/>
+            <a:off x="402336" y="3360419"/>
             <a:ext cx="3593592" cy="914400"/>
           </a:xfrm>
           <a:prstGeom prst="rect">
@@ -17602,7 +17602,7 @@
         </p:nvSpPr>
         <p:spPr>
           <a:xfrm>
-            <a:off x="4206240" y="1143000"/>
+            <a:off x="4224528" y="1824227"/>
             <a:ext cx="3794760" cy="685800"/>
           </a:xfrm>
           <a:prstGeom prst="rect">
@@ -17646,7 +17646,7 @@
         </p:nvSpPr>
         <p:spPr>
           <a:xfrm>
-            <a:off x="4297680" y="1170432"/>
+            <a:off x="4315968" y="1851659"/>
             <a:ext cx="3611880" cy="292608"/>
           </a:xfrm>
           <a:prstGeom prst="rect">
@@ -17681,7 +17681,7 @@
         </p:nvSpPr>
         <p:spPr>
           <a:xfrm>
-            <a:off x="4297680" y="1444752"/>
+            <a:off x="4315968" y="2125979"/>
             <a:ext cx="3611880" cy="320040"/>
           </a:xfrm>
           <a:prstGeom prst="rect">
@@ -17716,7 +17716,7 @@
         </p:nvSpPr>
         <p:spPr>
           <a:xfrm>
-            <a:off x="4206240" y="1828800"/>
+            <a:off x="4224528" y="2510027"/>
             <a:ext cx="3794760" cy="502920"/>
           </a:xfrm>
           <a:prstGeom prst="rect">
@@ -17760,7 +17760,7 @@
         </p:nvSpPr>
         <p:spPr>
           <a:xfrm>
-            <a:off x="4297680" y="1874519"/>
+            <a:off x="4315968" y="2555746"/>
             <a:ext cx="3611880" cy="256032"/>
           </a:xfrm>
           <a:prstGeom prst="rect">
@@ -17795,7 +17795,7 @@
         </p:nvSpPr>
         <p:spPr>
           <a:xfrm>
-            <a:off x="4297680" y="2084831"/>
+            <a:off x="4315968" y="2766058"/>
             <a:ext cx="3611880" cy="201168"/>
           </a:xfrm>
           <a:prstGeom prst="rect">
@@ -17830,7 +17830,7 @@
         </p:nvSpPr>
         <p:spPr>
           <a:xfrm>
-            <a:off x="4206240" y="2331720"/>
+            <a:off x="4224528" y="3012947"/>
             <a:ext cx="3794760" cy="347472"/>
           </a:xfrm>
           <a:prstGeom prst="rect">
@@ -17874,7 +17874,7 @@
         </p:nvSpPr>
         <p:spPr>
           <a:xfrm>
-            <a:off x="4297680" y="2359152"/>
+            <a:off x="4315968" y="3040379"/>
             <a:ext cx="3611880" cy="292608"/>
           </a:xfrm>
           <a:prstGeom prst="rect">
@@ -17909,7 +17909,7 @@
         </p:nvSpPr>
         <p:spPr>
           <a:xfrm>
-            <a:off x="4206240" y="2679192"/>
+            <a:off x="4224528" y="3360419"/>
             <a:ext cx="3794760" cy="914400"/>
           </a:xfrm>
           <a:prstGeom prst="rect">
@@ -17953,7 +17953,7 @@
         </p:nvSpPr>
         <p:spPr>
           <a:xfrm>
-            <a:off x="4315968" y="2679192"/>
+            <a:off x="4334256" y="3360419"/>
             <a:ext cx="3593592" cy="914400"/>
           </a:xfrm>
           <a:prstGeom prst="rect">
@@ -17998,7 +17998,7 @@
         </p:nvSpPr>
         <p:spPr>
           <a:xfrm>
-            <a:off x="8138160" y="1143000"/>
+            <a:off x="8156448" y="1824227"/>
             <a:ext cx="3794760" cy="685800"/>
           </a:xfrm>
           <a:prstGeom prst="rect">
@@ -18042,7 +18042,7 @@
         </p:nvSpPr>
         <p:spPr>
           <a:xfrm>
-            <a:off x="8229600" y="1170432"/>
+            <a:off x="8247888" y="1851659"/>
             <a:ext cx="3611880" cy="292608"/>
           </a:xfrm>
           <a:prstGeom prst="rect">
@@ -18077,7 +18077,7 @@
         </p:nvSpPr>
         <p:spPr>
           <a:xfrm>
-            <a:off x="8229600" y="1444752"/>
+            <a:off x="8247888" y="2125979"/>
             <a:ext cx="3611880" cy="320040"/>
           </a:xfrm>
           <a:prstGeom prst="rect">
@@ -18112,7 +18112,7 @@
         </p:nvSpPr>
         <p:spPr>
           <a:xfrm>
-            <a:off x="8138160" y="1828800"/>
+            <a:off x="8156448" y="2510027"/>
             <a:ext cx="3794760" cy="502920"/>
           </a:xfrm>
           <a:prstGeom prst="rect">
@@ -18156,7 +18156,7 @@
         </p:nvSpPr>
         <p:spPr>
           <a:xfrm>
-            <a:off x="8229600" y="1874519"/>
+            <a:off x="8247888" y="2555746"/>
             <a:ext cx="3611880" cy="256032"/>
           </a:xfrm>
           <a:prstGeom prst="rect">
@@ -18191,7 +18191,7 @@
         </p:nvSpPr>
         <p:spPr>
           <a:xfrm>
-            <a:off x="8229600" y="2084831"/>
+            <a:off x="8247888" y="2766058"/>
             <a:ext cx="3611880" cy="201168"/>
           </a:xfrm>
           <a:prstGeom prst="rect">
@@ -18226,7 +18226,7 @@
         </p:nvSpPr>
         <p:spPr>
           <a:xfrm>
-            <a:off x="8138160" y="2331720"/>
+            <a:off x="8156448" y="3012947"/>
             <a:ext cx="3794760" cy="347472"/>
           </a:xfrm>
           <a:prstGeom prst="rect">
@@ -18270,7 +18270,7 @@
         </p:nvSpPr>
         <p:spPr>
           <a:xfrm>
-            <a:off x="8229600" y="2359152"/>
+            <a:off x="8247888" y="3040379"/>
             <a:ext cx="3611880" cy="292608"/>
           </a:xfrm>
           <a:prstGeom prst="rect">
@@ -18305,7 +18305,7 @@
         </p:nvSpPr>
         <p:spPr>
           <a:xfrm>
-            <a:off x="8138160" y="2679192"/>
+            <a:off x="8156448" y="3360419"/>
             <a:ext cx="3794760" cy="914400"/>
           </a:xfrm>
           <a:prstGeom prst="rect">
@@ -18349,7 +18349,7 @@
         </p:nvSpPr>
         <p:spPr>
           <a:xfrm>
-            <a:off x="8247888" y="2679192"/>
+            <a:off x="8266176" y="3360419"/>
             <a:ext cx="3593592" cy="914400"/>
           </a:xfrm>
           <a:prstGeom prst="rect">
@@ -18386,30 +18386,6 @@
           </a:p>
         </p:txBody>
       </p:sp>
-      <p:pic>
-        <p:nvPicPr>
-          <p:cNvPr id="45" name="Picture 44" descr="image.png"/>
-          <p:cNvPicPr>
-            <a:picLocks noChangeAspect="1"/>
-          </p:cNvPicPr>
-          <p:nvPr/>
-        </p:nvPicPr>
-        <p:blipFill>
-          <a:blip r:embed="rId3"/>
-          <a:stretch>
-            <a:fillRect/>
-          </a:stretch>
-        </p:blipFill>
-        <p:spPr>
-          <a:xfrm>
-            <a:off x="1275588" y="3703320"/>
-            <a:ext cx="9427464" cy="2834640"/>
-          </a:xfrm>
-          <a:prstGeom prst="rect">
-            <a:avLst/>
-          </a:prstGeom>
-        </p:spPr>
-      </p:pic>
     </p:spTree>
   </p:cSld>
   <p:clrMapOvr>

--- a/ds_candidate_assignment/Spendy_Loyalty_Presentation_Premium.pptx
+++ b/ds_candidate_assignment/Spendy_Loyalty_Presentation_Premium.pptx
@@ -429,25 +429,22 @@
           <a:p>
             <a:r>
               <a:rPr lang="en-US" dirty="0"/>
-              <a:t>Introduce yourself and frame what the next 15–20 minutes cover.</a:t>
-            </a:r>
-          </a:p>
-          <a:p>
-            <a:endParaRPr lang="en-US" dirty="0"/>
-          </a:p>
-          <a:p>
-            <a:r>
-              <a:rPr lang="en-US" dirty="0"/>
-              <a:t>SAY: "I looked at a core question for Spendy: who are your loyal customers, and can you identify them early enough to act? The analysis runs end to end — from defining what loyalty actually means in this dataset, through building a machine learning model, to producing a three-tier segmentation that marketing can act on directly."</a:t>
-            </a:r>
-          </a:p>
-          <a:p>
-            <a:endParaRPr lang="en-US" dirty="0"/>
-          </a:p>
-          <a:p>
-            <a:r>
-              <a:rPr lang="en-US" dirty="0"/>
-              <a:t>Keep it short. Move to slide 2.</a:t>
+              <a:t>Introduce yourself briefly</a:t>
+            </a:r>
+          </a:p>
+          <a:p>
+            <a:r>
+              <a:t>Frame the problem: who are Spendy's loyal customers and can we predict them early?</a:t>
+            </a:r>
+          </a:p>
+          <a:p>
+            <a:r>
+              <a:t>Tell them the talk covers: definition → model → segmentation → business action</a:t>
+            </a:r>
+          </a:p>
+          <a:p>
+            <a:r>
+              <a:t>Keep it under 30 seconds, move on</a:t>
             </a:r>
           </a:p>
         </p:txBody>
@@ -518,25 +515,27 @@
           <a:p>
             <a:r>
               <a:rPr lang="en-US" dirty="0"/>
-              <a:t>Go through the five areas quickly. The purpose is to show self-awareness, not to spend time on what you didn't do.</a:t>
-            </a:r>
-          </a:p>
-          <a:p>
-            <a:endParaRPr lang="en-US" dirty="0"/>
-          </a:p>
-          <a:p>
-            <a:r>
-              <a:rPr lang="en-US" dirty="0"/>
-              <a:t>SAY: "Five areas where I'd extend this given more time or data. A longer observation window, richer transaction signals like product categories and promotions, additional behavioural features around purchase regularity, trying Gradient Boosting with calibrated probabilities, and — most importantly — setting the probability thresholds by marketing ROI rather than fixed percentiles. The last one is purely a business decision, not a modelling one."</a:t>
-            </a:r>
-          </a:p>
-          <a:p>
-            <a:endParaRPr lang="en-US" dirty="0"/>
-          </a:p>
-          <a:p>
-            <a:r>
-              <a:rPr lang="en-US" dirty="0"/>
-              <a:t>Don't dwell. Move to the conclusion.</a:t>
+              <a:t>Go through quickly — this shows self-awareness, not what you missed</a:t>
+            </a:r>
+          </a:p>
+          <a:p>
+            <a:r>
+              <a:t>Longer data window, richer signals (categories, promotions, demographics)</a:t>
+            </a:r>
+          </a:p>
+          <a:p>
+            <a:r>
+              <a:t>Purchase regularity features within the 60-day window</a:t>
+            </a:r>
+          </a:p>
+          <a:p>
+            <a:r>
+              <a:t>Gradient Boosting with probability calibration as the next model</a:t>
+            </a:r>
+          </a:p>
+          <a:p>
+            <a:r>
+              <a:t>Segment thresholds should be driven by marketing ROI, not fixed percentiles — purely a business call</a:t>
             </a:r>
           </a:p>
         </p:txBody>
@@ -607,34 +606,27 @@
           <a:p>
             <a:r>
               <a:rPr lang="en-US" dirty="0"/>
-              <a:t>Bring everything together cleanly. This is the leave-behind slide.</a:t>
-            </a:r>
-          </a:p>
-          <a:p>
-            <a:endParaRPr lang="en-US" dirty="0"/>
-          </a:p>
-          <a:p>
-            <a:r>
-              <a:rPr lang="en-US" dirty="0"/>
-              <a:t>SAY: "To summarise: Define — a rigorous five-gate loyalty rule that produces a label with real meaning, not just high coverage. Predict — a Random Forest model that scores new users after 60 days with AUC 0.912 and zero feature leakage. Act — three calibrated tiers with a distinct marketing action for each.</a:t>
-            </a:r>
-          </a:p>
-          <a:p>
-            <a:endParaRPr lang="en-US" dirty="0"/>
-          </a:p>
-          <a:p>
-            <a:r>
-              <a:rPr lang="en-US" dirty="0"/>
-              <a:t>The business outcome: loyalty goes from a vague aspiration to something measurable, scoreable, and actionable. Happy to take any questions."</a:t>
-            </a:r>
-          </a:p>
-          <a:p>
-            <a:endParaRPr lang="en-US" dirty="0"/>
-          </a:p>
-          <a:p>
-            <a:r>
-              <a:rPr lang="en-US" dirty="0"/>
-              <a:t>End with confidence. Don't hedge.</a:t>
+              <a:t>Define: 5-gate loyalty rule, 4.6% rate, label has real signal</a:t>
+            </a:r>
+          </a:p>
+          <a:p>
+            <a:r>
+              <a:t>Predict: AUC 0.912, zero leakage, handles 1-in-31 imbalance</a:t>
+            </a:r>
+          </a:p>
+          <a:p>
+            <a:r>
+              <a:t>Act: 3 calibrated tiers, distinct playbook per segment</a:t>
+            </a:r>
+          </a:p>
+          <a:p>
+            <a:r>
+              <a:t>End with: loyalty goes from a vague aspiration to something measurable and actionable</a:t>
+            </a:r>
+          </a:p>
+          <a:p>
+            <a:r>
+              <a:t>Invite questions — end with confidence</a:t>
             </a:r>
           </a:p>
         </p:txBody>
@@ -705,25 +697,27 @@
           <a:p>
             <a:r>
               <a:rPr lang="en-US" dirty="0"/>
-              <a:t>The 75% finding is your hook — use it to draw the merchant-vs-platform distinction clearly.</a:t>
-            </a:r>
-          </a:p>
-          <a:p>
-            <a:endParaRPr lang="en-US" dirty="0"/>
-          </a:p>
-          <a:p>
-            <a:r>
-              <a:rPr lang="en-US" dirty="0"/>
-              <a:t>SAY: "The starting observation is that 75% of Spendy users shop at exactly one merchant. That means most users are loyal to a coffee shop, not to Spendy. If that merchant leaves, the customer disappears with them. The business question becomes: which users have transferred loyalty to the platform itself, not just a single merchant? That distinction didn't exist before this analysis."</a:t>
-            </a:r>
-          </a:p>
-          <a:p>
-            <a:endParaRPr lang="en-US" dirty="0"/>
-          </a:p>
-          <a:p>
-            <a:r>
-              <a:rPr lang="en-US" dirty="0"/>
-              <a:t>Pause after the 75% line — let it land.</a:t>
+              <a:t>Lead with the 75% stat — let it land before moving on</a:t>
+            </a:r>
+          </a:p>
+          <a:p>
+            <a:r>
+              <a:t>Key point: most users are loyal to a merchant, not to Spendy</a:t>
+            </a:r>
+          </a:p>
+          <a:p>
+            <a:r>
+              <a:t>If that merchant leaves, the customer disappears — that's the risk</a:t>
+            </a:r>
+          </a:p>
+          <a:p>
+            <a:r>
+              <a:t>This is why raw purchase counts are a bad loyalty proxy</a:t>
+            </a:r>
+          </a:p>
+          <a:p>
+            <a:r>
+              <a:t>Prediction at Month 2 is cheaper than re-acquisition later</a:t>
             </a:r>
           </a:p>
         </p:txBody>
@@ -794,25 +788,27 @@
           <a:p>
             <a:r>
               <a:rPr lang="en-US" dirty="0"/>
-              <a:t>Briefly orient the audience on the data before getting into the methodology.</a:t>
-            </a:r>
-          </a:p>
-          <a:p>
-            <a:endParaRPr lang="en-US" dirty="0"/>
-          </a:p>
-          <a:p>
-            <a:r>
-              <a:rPr lang="en-US" dirty="0"/>
-              <a:t>SAY: "The dataset covers six months — June to December 2020 — with transaction-level data across users and merchants. One thing worth flagging: roughly half the users have no first-purchase flag, meaning they joined before the observation window. Their tenure is measured from June 1, which slightly understates it, but the ML model handles this cleanly by using only new users who joined during the window."</a:t>
-            </a:r>
-          </a:p>
-          <a:p>
-            <a:endParaRPr lang="en-US" dirty="0"/>
-          </a:p>
-          <a:p>
-            <a:r>
-              <a:rPr lang="en-US" dirty="0"/>
-              <a:t>Don't dwell. The data section exists to establish credibility, not to be interesting.</a:t>
+              <a:t>759K transactions, 136.8K users, 711 shops, Jun–Dec 2020</a:t>
+            </a:r>
+          </a:p>
+          <a:p>
+            <a:r>
+              <a:t>~47% of users joined before the window — tenure measured from June 1 for them</a:t>
+            </a:r>
+          </a:p>
+          <a:p>
+            <a:r>
+              <a:t>ML model uses only new users to avoid that ambiguity</a:t>
+            </a:r>
+          </a:p>
+          <a:p>
+            <a:r>
+              <a:t>No missing values — clean dataset, no imputation needed</a:t>
+            </a:r>
+          </a:p>
+          <a:p>
+            <a:r>
+              <a:t>Keep this brief — data section is credibility, not the main story</a:t>
             </a:r>
           </a:p>
         </p:txBody>
@@ -883,34 +879,32 @@
           <a:p>
             <a:r>
               <a:rPr lang="en-US" dirty="0"/>
-              <a:t>This is the most important conceptual slide. Spend time here — the definition is the foundation everything else builds on.</a:t>
-            </a:r>
-          </a:p>
-          <a:p>
-            <a:endParaRPr lang="en-US" dirty="0"/>
-          </a:p>
-          <a:p>
-            <a:r>
-              <a:rPr lang="en-US" dirty="0"/>
-              <a:t>SAY: "Before any modelling, I needed a definition. I used five gates: a user is loyal only if they hit minimum frequency, minimum spend, recent activity, sufficient tenure, AND platform breadth or depth — meaning they either buy across multiple merchants or go deep at one. The AND/OR logic matters: it prevents a seasonal spike from qualifying someone who never returned.</a:t>
-            </a:r>
-          </a:p>
-          <a:p>
-            <a:endParaRPr lang="en-US" dirty="0"/>
-          </a:p>
-          <a:p>
-            <a:r>
-              <a:rPr lang="en-US" dirty="0"/>
-              <a:t>The result is a 4.6% loyalty rate — 6,273 users out of 136,000. That might sound low, but a reward programme that covers 30% of users isn't a loyalty programme, it's a blanket discount scheme. The 4.6% means the label has real signal."</a:t>
-            </a:r>
-          </a:p>
-          <a:p>
-            <a:endParaRPr lang="en-US" dirty="0"/>
-          </a:p>
-          <a:p>
-            <a:r>
-              <a:rPr lang="en-US" dirty="0"/>
-              <a:t>Be ready to defend individual threshold choices if asked — each one came from the EDA.</a:t>
+              <a:t>Most important slide — spend the most time here</a:t>
+            </a:r>
+          </a:p>
+          <a:p>
+            <a:r>
+              <a:t>4 hard AND requirements: frequency &gt;= 2/month, spend &gt;= 10K JPY, recency &lt;= 2 months, tenure &gt;= 3 months</a:t>
+            </a:r>
+          </a:p>
+          <a:p>
+            <a:r>
+              <a:t>5th: platform loyalty = 2+ shops OR 6+ active months (either path qualifies)</a:t>
+            </a:r>
+          </a:p>
+          <a:p>
+            <a:r>
+              <a:t>Result: 4.6% loyal — 6,273 users out of 136,830</a:t>
+            </a:r>
+          </a:p>
+          <a:p>
+            <a:r>
+              <a:t>Low rate is intentional — rewards are attached to this label, so false positives cost money</a:t>
+            </a:r>
+          </a:p>
+          <a:p>
+            <a:r>
+              <a:t>Be ready to defend individual thresholds — each came from the EDA</a:t>
             </a:r>
           </a:p>
         </p:txBody>
@@ -981,25 +975,27 @@
           <a:p>
             <a:r>
               <a:rPr lang="en-US" dirty="0"/>
-              <a:t>Focus on the no-leakage guarantee and the Month 2 rationale — these are the two things an interviewer will probe.</a:t>
-            </a:r>
-          </a:p>
-          <a:p>
-            <a:endParaRPr lang="en-US" dirty="0"/>
-          </a:p>
-          <a:p>
-            <a:r>
-              <a:rPr lang="en-US" dirty="0"/>
-              <a:t>SAY: "Five features, all computed from the first 60 days of a user's activity only. The 60-day cutoff is deliberate: Month 2 is the earliest point where someone has revealed enough behaviour to distinguish a habitual buyer from a one-off visitor. Using only days 0 to 60 also prevents any data leakage — at scoring time, no data beyond month 2 exists for a new user.</a:t>
-            </a:r>
-          </a:p>
-          <a:p>
-            <a:endParaRPr lang="en-US" dirty="0"/>
-          </a:p>
-          <a:p>
-            <a:r>
-              <a:rPr lang="en-US" dirty="0"/>
-              <a:t>The spend trend feature — Month 1 to Month 2 momentum — is the only one that looks across time within the window. Everything else is a cumulative summary.</a:t>
+              <a:t>5 features, all from days 0–60 only — no leakage</a:t>
+            </a:r>
+          </a:p>
+          <a:p>
+            <a:r>
+              <a:t>60-day window: earliest point where behaviour signals habit vs one-off</a:t>
+            </a:r>
+          </a:p>
+          <a:p>
+            <a:r>
+              <a:t>Features mirror the loyalty components directly (freq, spend, shops, recency, spend trend)</a:t>
+            </a:r>
+          </a:p>
+          <a:p>
+            <a:r>
+              <a:t>spend_month_comparison is the only time-aware feature — Month 1 vs Month 2 momentum</a:t>
+            </a:r>
+          </a:p>
+          <a:p>
+            <a:r>
+              <a:t>If asked about leakage: labels set at Dec 31, features capped at day 60 — strictly separated</a:t>
             </a:r>
           </a:p>
         </p:txBody>
@@ -1070,25 +1066,22 @@
           <a:p>
             <a:r>
               <a:rPr lang="en-US" dirty="0"/>
-              <a:t>Make the case for Random Forest concisely. Don't over-explain unless asked.</a:t>
-            </a:r>
-          </a:p>
-          <a:p>
-            <a:endParaRPr lang="en-US" dirty="0"/>
-          </a:p>
-          <a:p>
-            <a:r>
-              <a:rPr lang="en-US" dirty="0"/>
-              <a:t>SAY: "Random Forest was selected for three reasons: it handles class imbalance well with class_weight='balanced', it gives native feature importances without needing a separate explainability layer, and tree-based ensembles are robust to the kind of skewed distributions you get with spend data. Logistic regression was tested as a baseline but AUC was noticeably lower. The choice was driven by the data, not convention."</a:t>
-            </a:r>
-          </a:p>
-          <a:p>
-            <a:endParaRPr lang="en-US" dirty="0"/>
-          </a:p>
-          <a:p>
-            <a:r>
-              <a:rPr lang="en-US" dirty="0"/>
-              <a:t>If asked about deep learning or other models — that's a good segue to the Future Improvements slide.</a:t>
+              <a:t>Random Forest chosen for 3 reasons: handles imbalance, gives feature importances, robust to skewed spend data</a:t>
+            </a:r>
+          </a:p>
+          <a:p>
+            <a:r>
+              <a:t>class_weight='balanced' — loyal users are 1 in 31, model needs to take them seriously</a:t>
+            </a:r>
+          </a:p>
+          <a:p>
+            <a:r>
+              <a:t>Spend (26%) and frequency (30%) drive over half the model — consistent with the definition</a:t>
+            </a:r>
+          </a:p>
+          <a:p>
+            <a:r>
+              <a:t>If asked about other models: Gradient Boosting is the natural next step — in Future Improvements</a:t>
             </a:r>
           </a:p>
         </p:txBody>
@@ -1159,34 +1152,27 @@
           <a:p>
             <a:r>
               <a:rPr lang="en-US" dirty="0"/>
-              <a:t>Lead with AUC, then explain what the confusion matrix shows at the 0.5 threshold.</a:t>
-            </a:r>
-          </a:p>
-          <a:p>
-            <a:endParaRPr lang="en-US" dirty="0"/>
-          </a:p>
-          <a:p>
-            <a:r>
-              <a:rPr lang="en-US" dirty="0"/>
-              <a:t>SAY: "AUC 0.912 means the model correctly ranks a loyal user above a non-loyal one 91.2% of the time on the held-out test set. That's a strong discrimination result.</a:t>
-            </a:r>
-          </a:p>
-          <a:p>
-            <a:endParaRPr lang="en-US" dirty="0"/>
-          </a:p>
-          <a:p>
-            <a:r>
-              <a:rPr lang="en-US" dirty="0"/>
-              <a:t>At the standard 0.5 threshold, recall is 45% — the model misses more than half of loyal users. But the segmentation in the next slide doesn't use a hard threshold. It uses the full probability score, which is why the High segment achieves 83.9% actual loyalty even though raw recall at 0.5 looks modest."</a:t>
-            </a:r>
-          </a:p>
-          <a:p>
-            <a:endParaRPr lang="en-US" dirty="0"/>
-          </a:p>
-          <a:p>
-            <a:r>
-              <a:rPr lang="en-US" dirty="0"/>
-              <a:t>The confusion matrix is there to show you're not hiding anything. Be upfront about recall.</a:t>
+              <a:t>Lead with AUC 0.912 — correctly ranks loyal above non-loyal 91.2% of the time</a:t>
+            </a:r>
+          </a:p>
+          <a:p>
+            <a:r>
+              <a:t>Precision 0.34, Recall 0.45, F1 0.39 — all at the default 0.5 threshold</a:t>
+            </a:r>
+          </a:p>
+          <a:p>
+            <a:r>
+              <a:t>Recall is low at 0.5 because that threshold is too strict for 3.2% base rate</a:t>
+            </a:r>
+          </a:p>
+          <a:p>
+            <a:r>
+              <a:t>The segmentation doesn't use 0.5 — it uses probability scores directly, which is why High hits 83.9%</a:t>
+            </a:r>
+          </a:p>
+          <a:p>
+            <a:r>
+              <a:t>Be upfront about recall — don't hide it</a:t>
             </a:r>
           </a:p>
         </p:txBody>
@@ -1257,34 +1243,32 @@
           <a:p>
             <a:r>
               <a:rPr lang="en-US" dirty="0"/>
-              <a:t>Walk through the three tiers and the calibration numbers.</a:t>
-            </a:r>
-          </a:p>
-          <a:p>
-            <a:endParaRPr lang="en-US" dirty="0"/>
-          </a:p>
-          <a:p>
-            <a:r>
-              <a:rPr lang="en-US" dirty="0"/>
-              <a:t>SAY: "The 136,000 users are split into three tiers by their predicted probability score. The key calibration check: average predicted probabilities for the three groups are 0.10, 0.44, and 0.95 — which means the model isn't hedging, it's genuinely discriminating between groups.</a:t>
-            </a:r>
-          </a:p>
-          <a:p>
-            <a:endParaRPr lang="en-US" dirty="0"/>
-          </a:p>
-          <a:p>
-            <a:r>
-              <a:rPr lang="en-US" dirty="0"/>
-              <a:t>In the High tier, 83.9% of users turned out to be actually loyal. That's the group you reward and retain. Medium tier — nudge with targeted spend incentives. Low tier — either re-engage or deprioritise, and redirect budget."</a:t>
-            </a:r>
-          </a:p>
-          <a:p>
-            <a:endParaRPr lang="en-US" dirty="0"/>
-          </a:p>
-          <a:p>
-            <a:r>
-              <a:rPr lang="en-US" dirty="0"/>
-              <a:t>Be ready to explain how the 33%/66% cutoffs were chosen — acknowledge they're heuristic, and point ahead to Future Improvements.</a:t>
+              <a:t>3 tiers: Low &lt; 0.33, Medium 0.33–0.66, High &gt; 0.66</a:t>
+            </a:r>
+          </a:p>
+          <a:p>
+            <a:r>
+              <a:t>Calibration check: avg scores are 0.10 / 0.44 / 0.95 — model is discriminating, not hedging</a:t>
+            </a:r>
+          </a:p>
+          <a:p>
+            <a:r>
+              <a:t>High: 83.9% actual loyalty — reward and retain</a:t>
+            </a:r>
+          </a:p>
+          <a:p>
+            <a:r>
+              <a:t>Medium: 6.3% — nudge with spend incentives or merchant discovery</a:t>
+            </a:r>
+          </a:p>
+          <a:p>
+            <a:r>
+              <a:t>Low: 1.0% — re-engage cheaply or deprioritise and redirect budget</a:t>
+            </a:r>
+          </a:p>
+          <a:p>
+            <a:r>
+              <a:t>If asked about 0.33/0.66 cutoffs: heuristic, should be set by ROI — mention Future Improvements</a:t>
             </a:r>
           </a:p>
         </p:txBody>
@@ -1355,34 +1339,27 @@
           <a:p>
             <a:r>
               <a:rPr lang="en-US" dirty="0"/>
-              <a:t>Connect the analysis outputs to concrete business value. This slide is for the marketing or product stakeholder in the room.</a:t>
-            </a:r>
-          </a:p>
-          <a:p>
-            <a:endParaRPr lang="en-US" dirty="0"/>
-          </a:p>
-          <a:p>
-            <a:r>
-              <a:rPr lang="en-US" dirty="0"/>
-              <a:t>SAY: "Three things this analysis gives the business for the first time. First: 6,273 loyal customers, identified and named. Second: Month 2 scoring — Spendy can flag new users as high or low loyalty potential before they've decided whether to stay. Third: 83.9% confidence in the High segment means marketing spend on that group is backed by real signal, not gut feel.</a:t>
-            </a:r>
-          </a:p>
-          <a:p>
-            <a:endParaRPr lang="en-US" dirty="0"/>
-          </a:p>
-          <a:p>
-            <a:r>
-              <a:rPr lang="en-US" dirty="0"/>
-              <a:t>The three-tier playbook on the lower half is the operational output — each tier has a distinct action, not a one-size-fits-all campaign."</a:t>
-            </a:r>
-          </a:p>
-          <a:p>
-            <a:endParaRPr lang="en-US" dirty="0"/>
-          </a:p>
-          <a:p>
-            <a:r>
-              <a:rPr lang="en-US" dirty="0"/>
-              <a:t>Keep this slide punchy. It's the 'so what' moment.</a:t>
+              <a:t>This is the 'so what' slide — keep it punchy</a:t>
+            </a:r>
+          </a:p>
+          <a:p>
+            <a:r>
+              <a:t>6,273 loyal customers named for the first time</a:t>
+            </a:r>
+          </a:p>
+          <a:p>
+            <a:r>
+              <a:t>Month 2 scoring: flag users before they decide to stay or leave</a:t>
+            </a:r>
+          </a:p>
+          <a:p>
+            <a:r>
+              <a:t>High segment: 4 in 5 users the model was confident about actually turned out loyal</a:t>
+            </a:r>
+          </a:p>
+          <a:p>
+            <a:r>
+              <a:t>Each tier has a distinct action — not a one-size-fits-all campaign</a:t>
             </a:r>
           </a:p>
         </p:txBody>
